--- a/Section 504/t2-lesson3-perpendicular-slopes-504.pptx
+++ b/Section 504/t2-lesson3-perpendicular-slopes-504.pptx
@@ -2413,6 +2413,40 @@
           </a:p>
         </p:txBody>
       </p:sp>
+      <p:sp>
+        <p:nvSpPr>
+          <p:cNvPr id="9" name="Slide Number 9"/>
+          <p:cNvSpPr txBox="1"/>
+          <p:nvPr/>
+        </p:nvSpPr>
+        <p:spPr>
+          <a:xfrm>
+            <a:off x="11277295" y="6611112"/>
+            <a:ext cx="685800" cy="201168"/>
+          </a:xfrm>
+          <a:prstGeom prst="rect">
+            <a:avLst/>
+          </a:prstGeom>
+          <a:noFill/>
+        </p:spPr>
+        <p:txBody>
+          <a:bodyPr wrap="none" lIns="0" tIns="0" rIns="0" bIns="0" anchor="b">
+            <a:noAutofit/>
+          </a:bodyPr>
+          <a:lstStyle/>
+          <a:p>
+            <a:pPr algn="r"/>
+            <a:fld id="{5C1A6E0B-3B1F-4D5E-9C7A-2F4B8D6E1A90}" type="slidenum">
+              <a:rPr lang="en-US" sz="1200" dirty="0">
+                <a:solidFill>
+                  <a:srgbClr val="5F6272"/>
+                </a:solidFill>
+              </a:rPr>
+              <a:t>1</a:t>
+            </a:fld>
+          </a:p>
+        </p:txBody>
+      </p:sp>
     </p:spTree>
   </p:cSld>
   <p:clrMapOvr>
@@ -3056,6 +3090,40 @@
               <a:t xml:space="preserve">Flip the fraction and change the sign. Check: the product is −1.</a:t>
             </a:r>
             <a:endParaRPr lang="en-US" sz="1575" dirty="0"/>
+          </a:p>
+        </p:txBody>
+      </p:sp>
+      <p:sp>
+        <p:nvSpPr>
+          <p:cNvPr id="11" name="Slide Number 11"/>
+          <p:cNvSpPr txBox="1"/>
+          <p:nvPr/>
+        </p:nvSpPr>
+        <p:spPr>
+          <a:xfrm>
+            <a:off x="11277295" y="6611112"/>
+            <a:ext cx="685800" cy="201168"/>
+          </a:xfrm>
+          <a:prstGeom prst="rect">
+            <a:avLst/>
+          </a:prstGeom>
+          <a:noFill/>
+        </p:spPr>
+        <p:txBody>
+          <a:bodyPr wrap="none" lIns="0" tIns="0" rIns="0" bIns="0" anchor="b">
+            <a:noAutofit/>
+          </a:bodyPr>
+          <a:lstStyle/>
+          <a:p>
+            <a:pPr algn="r"/>
+            <a:fld id="{5C1A6E0B-3B1F-4D5E-9C7A-2F4B8D6E1A90}" type="slidenum">
+              <a:rPr lang="en-US" sz="1200" dirty="0">
+                <a:solidFill>
+                  <a:srgbClr val="5F6272"/>
+                </a:solidFill>
+              </a:rPr>
+              <a:t>10</a:t>
+            </a:fld>
           </a:p>
         </p:txBody>
       </p:sp>
@@ -4193,6 +4261,40 @@
           </a:p>
         </p:txBody>
       </p:sp>
+      <p:sp>
+        <p:nvSpPr>
+          <p:cNvPr id="15" name="Slide Number 15"/>
+          <p:cNvSpPr txBox="1"/>
+          <p:nvPr/>
+        </p:nvSpPr>
+        <p:spPr>
+          <a:xfrm>
+            <a:off x="11277295" y="6611112"/>
+            <a:ext cx="685800" cy="201168"/>
+          </a:xfrm>
+          <a:prstGeom prst="rect">
+            <a:avLst/>
+          </a:prstGeom>
+          <a:noFill/>
+        </p:spPr>
+        <p:txBody>
+          <a:bodyPr wrap="none" lIns="0" tIns="0" rIns="0" bIns="0" anchor="b">
+            <a:noAutofit/>
+          </a:bodyPr>
+          <a:lstStyle/>
+          <a:p>
+            <a:pPr algn="r"/>
+            <a:fld id="{5C1A6E0B-3B1F-4D5E-9C7A-2F4B8D6E1A90}" type="slidenum">
+              <a:rPr lang="en-US" sz="1200" dirty="0">
+                <a:solidFill>
+                  <a:srgbClr val="5F6272"/>
+                </a:solidFill>
+              </a:rPr>
+              <a:t>11</a:t>
+            </a:fld>
+          </a:p>
+        </p:txBody>
+      </p:sp>
     </p:spTree>
   </p:cSld>
   <p:clrMapOvr>
@@ -4350,6 +4452,40 @@
               <a:t xml:space="preserve">Essential Question: How can you rotate the graphs of linear equations to determine the slopes of perpendicular lines?</a:t>
             </a:r>
             <a:endParaRPr lang="en-US" sz="2400" dirty="0"/>
+          </a:p>
+        </p:txBody>
+      </p:sp>
+      <p:sp>
+        <p:nvSpPr>
+          <p:cNvPr id="5" name="Slide Number 5"/>
+          <p:cNvSpPr txBox="1"/>
+          <p:nvPr/>
+        </p:nvSpPr>
+        <p:spPr>
+          <a:xfrm>
+            <a:off x="11277295" y="6611112"/>
+            <a:ext cx="685800" cy="201168"/>
+          </a:xfrm>
+          <a:prstGeom prst="rect">
+            <a:avLst/>
+          </a:prstGeom>
+          <a:noFill/>
+        </p:spPr>
+        <p:txBody>
+          <a:bodyPr wrap="none" lIns="0" tIns="0" rIns="0" bIns="0" anchor="b">
+            <a:noAutofit/>
+          </a:bodyPr>
+          <a:lstStyle/>
+          <a:p>
+            <a:pPr algn="r"/>
+            <a:fld id="{5C1A6E0B-3B1F-4D5E-9C7A-2F4B8D6E1A90}" type="slidenum">
+              <a:rPr lang="en-US" sz="1200" dirty="0">
+                <a:solidFill>
+                  <a:srgbClr val="5F6272"/>
+                </a:solidFill>
+              </a:rPr>
+              <a:t>12</a:t>
+            </a:fld>
           </a:p>
         </p:txBody>
       </p:sp>
@@ -5153,6 +5289,40 @@
               <a:t xml:space="preserve">−1</a:t>
             </a:r>
             <a:endParaRPr lang="en-US" sz="2325" dirty="0"/>
+          </a:p>
+        </p:txBody>
+      </p:sp>
+      <p:sp>
+        <p:nvSpPr>
+          <p:cNvPr id="12" name="Slide Number 12"/>
+          <p:cNvSpPr txBox="1"/>
+          <p:nvPr/>
+        </p:nvSpPr>
+        <p:spPr>
+          <a:xfrm>
+            <a:off x="11277295" y="6611112"/>
+            <a:ext cx="685800" cy="201168"/>
+          </a:xfrm>
+          <a:prstGeom prst="rect">
+            <a:avLst/>
+          </a:prstGeom>
+          <a:noFill/>
+        </p:spPr>
+        <p:txBody>
+          <a:bodyPr wrap="none" lIns="0" tIns="0" rIns="0" bIns="0" anchor="b">
+            <a:noAutofit/>
+          </a:bodyPr>
+          <a:lstStyle/>
+          <a:p>
+            <a:pPr algn="r"/>
+            <a:fld id="{5C1A6E0B-3B1F-4D5E-9C7A-2F4B8D6E1A90}" type="slidenum">
+              <a:rPr lang="en-US" sz="1200" dirty="0">
+                <a:solidFill>
+                  <a:srgbClr val="5F6272"/>
+                </a:solidFill>
+              </a:rPr>
+              <a:t>13</a:t>
+            </a:fld>
           </a:p>
         </p:txBody>
       </p:sp>
@@ -5966,6 +6136,40 @@
           </a:p>
         </p:txBody>
       </p:sp>
+      <p:sp>
+        <p:nvSpPr>
+          <p:cNvPr id="10" name="Slide Number 10"/>
+          <p:cNvSpPr txBox="1"/>
+          <p:nvPr/>
+        </p:nvSpPr>
+        <p:spPr>
+          <a:xfrm>
+            <a:off x="11277295" y="6611112"/>
+            <a:ext cx="685800" cy="201168"/>
+          </a:xfrm>
+          <a:prstGeom prst="rect">
+            <a:avLst/>
+          </a:prstGeom>
+          <a:noFill/>
+        </p:spPr>
+        <p:txBody>
+          <a:bodyPr wrap="none" lIns="0" tIns="0" rIns="0" bIns="0" anchor="b">
+            <a:noAutofit/>
+          </a:bodyPr>
+          <a:lstStyle/>
+          <a:p>
+            <a:pPr algn="r"/>
+            <a:fld id="{5C1A6E0B-3B1F-4D5E-9C7A-2F4B8D6E1A90}" type="slidenum">
+              <a:rPr lang="en-US" sz="1200" dirty="0">
+                <a:solidFill>
+                  <a:srgbClr val="5F6272"/>
+                </a:solidFill>
+              </a:rPr>
+              <a:t>14</a:t>
+            </a:fld>
+          </a:p>
+        </p:txBody>
+      </p:sp>
     </p:spTree>
   </p:cSld>
   <p:clrMapOvr>
@@ -8859,6 +9063,40 @@
               <a:t xml:space="preserve">H</a:t>
             </a:r>
             <a:endParaRPr lang="en-US" sz="1125" dirty="0"/>
+          </a:p>
+        </p:txBody>
+      </p:sp>
+      <p:sp>
+        <p:nvSpPr>
+          <p:cNvPr id="82" name="Slide Number 82"/>
+          <p:cNvSpPr txBox="1"/>
+          <p:nvPr/>
+        </p:nvSpPr>
+        <p:spPr>
+          <a:xfrm>
+            <a:off x="11277295" y="6611112"/>
+            <a:ext cx="685800" cy="201168"/>
+          </a:xfrm>
+          <a:prstGeom prst="rect">
+            <a:avLst/>
+          </a:prstGeom>
+          <a:noFill/>
+        </p:spPr>
+        <p:txBody>
+          <a:bodyPr wrap="none" lIns="0" tIns="0" rIns="0" bIns="0" anchor="b">
+            <a:noAutofit/>
+          </a:bodyPr>
+          <a:lstStyle/>
+          <a:p>
+            <a:pPr algn="r"/>
+            <a:fld id="{5C1A6E0B-3B1F-4D5E-9C7A-2F4B8D6E1A90}" type="slidenum">
+              <a:rPr lang="en-US" sz="1200" dirty="0">
+                <a:solidFill>
+                  <a:srgbClr val="5F6272"/>
+                </a:solidFill>
+              </a:rPr>
+              <a:t>15</a:t>
+            </a:fld>
           </a:p>
         </p:txBody>
       </p:sp>
@@ -10366,6 +10604,40 @@
               <a:t xml:space="preserve"> = 5</a:t>
             </a:r>
             <a:endParaRPr lang="en-US" sz="2325" dirty="0"/>
+          </a:p>
+        </p:txBody>
+      </p:sp>
+      <p:sp>
+        <p:nvSpPr>
+          <p:cNvPr id="16" name="Slide Number 16"/>
+          <p:cNvSpPr txBox="1"/>
+          <p:nvPr/>
+        </p:nvSpPr>
+        <p:spPr>
+          <a:xfrm>
+            <a:off x="11277295" y="6611112"/>
+            <a:ext cx="685800" cy="201168"/>
+          </a:xfrm>
+          <a:prstGeom prst="rect">
+            <a:avLst/>
+          </a:prstGeom>
+          <a:noFill/>
+        </p:spPr>
+        <p:txBody>
+          <a:bodyPr wrap="none" lIns="0" tIns="0" rIns="0" bIns="0" anchor="b">
+            <a:noAutofit/>
+          </a:bodyPr>
+          <a:lstStyle/>
+          <a:p>
+            <a:pPr algn="r"/>
+            <a:fld id="{5C1A6E0B-3B1F-4D5E-9C7A-2F4B8D6E1A90}" type="slidenum">
+              <a:rPr lang="en-US" sz="1200" dirty="0">
+                <a:solidFill>
+                  <a:srgbClr val="5F6272"/>
+                </a:solidFill>
+              </a:rPr>
+              <a:t>16</a:t>
+            </a:fld>
           </a:p>
         </p:txBody>
       </p:sp>
@@ -11691,6 +11963,40 @@
           </a:p>
         </p:txBody>
       </p:sp>
+      <p:sp>
+        <p:nvSpPr>
+          <p:cNvPr id="10" name="Slide Number 10"/>
+          <p:cNvSpPr txBox="1"/>
+          <p:nvPr/>
+        </p:nvSpPr>
+        <p:spPr>
+          <a:xfrm>
+            <a:off x="11277295" y="6611112"/>
+            <a:ext cx="685800" cy="201168"/>
+          </a:xfrm>
+          <a:prstGeom prst="rect">
+            <a:avLst/>
+          </a:prstGeom>
+          <a:noFill/>
+        </p:spPr>
+        <p:txBody>
+          <a:bodyPr wrap="none" lIns="0" tIns="0" rIns="0" bIns="0" anchor="b">
+            <a:noAutofit/>
+          </a:bodyPr>
+          <a:lstStyle/>
+          <a:p>
+            <a:pPr algn="r"/>
+            <a:fld id="{5C1A6E0B-3B1F-4D5E-9C7A-2F4B8D6E1A90}" type="slidenum">
+              <a:rPr lang="en-US" sz="1200" dirty="0">
+                <a:solidFill>
+                  <a:srgbClr val="5F6272"/>
+                </a:solidFill>
+              </a:rPr>
+              <a:t>17</a:t>
+            </a:fld>
+          </a:p>
+        </p:txBody>
+      </p:sp>
     </p:spTree>
   </p:cSld>
   <p:clrMapOvr>
@@ -12968,6 +13274,40 @@
               <a:t xml:space="preserve"> + 18</a:t>
             </a:r>
             <a:endParaRPr lang="en-US" sz="2325" dirty="0"/>
+          </a:p>
+        </p:txBody>
+      </p:sp>
+      <p:sp>
+        <p:nvSpPr>
+          <p:cNvPr id="13" name="Slide Number 13"/>
+          <p:cNvSpPr txBox="1"/>
+          <p:nvPr/>
+        </p:nvSpPr>
+        <p:spPr>
+          <a:xfrm>
+            <a:off x="11277295" y="6611112"/>
+            <a:ext cx="685800" cy="201168"/>
+          </a:xfrm>
+          <a:prstGeom prst="rect">
+            <a:avLst/>
+          </a:prstGeom>
+          <a:noFill/>
+        </p:spPr>
+        <p:txBody>
+          <a:bodyPr wrap="none" lIns="0" tIns="0" rIns="0" bIns="0" anchor="b">
+            <a:noAutofit/>
+          </a:bodyPr>
+          <a:lstStyle/>
+          <a:p>
+            <a:pPr algn="r"/>
+            <a:fld id="{5C1A6E0B-3B1F-4D5E-9C7A-2F4B8D6E1A90}" type="slidenum">
+              <a:rPr lang="en-US" sz="1200" dirty="0">
+                <a:solidFill>
+                  <a:srgbClr val="5F6272"/>
+                </a:solidFill>
+              </a:rPr>
+              <a:t>18</a:t>
+            </a:fld>
           </a:p>
         </p:txBody>
       </p:sp>
@@ -14227,6 +14567,40 @@
           </a:p>
         </p:txBody>
       </p:sp>
+      <p:sp>
+        <p:nvSpPr>
+          <p:cNvPr id="8" name="Slide Number 8"/>
+          <p:cNvSpPr txBox="1"/>
+          <p:nvPr/>
+        </p:nvSpPr>
+        <p:spPr>
+          <a:xfrm>
+            <a:off x="11277295" y="6611112"/>
+            <a:ext cx="685800" cy="201168"/>
+          </a:xfrm>
+          <a:prstGeom prst="rect">
+            <a:avLst/>
+          </a:prstGeom>
+          <a:noFill/>
+        </p:spPr>
+        <p:txBody>
+          <a:bodyPr wrap="none" lIns="0" tIns="0" rIns="0" bIns="0" anchor="b">
+            <a:noAutofit/>
+          </a:bodyPr>
+          <a:lstStyle/>
+          <a:p>
+            <a:pPr algn="r"/>
+            <a:fld id="{5C1A6E0B-3B1F-4D5E-9C7A-2F4B8D6E1A90}" type="slidenum">
+              <a:rPr lang="en-US" sz="1200" dirty="0">
+                <a:solidFill>
+                  <a:srgbClr val="5F6272"/>
+                </a:solidFill>
+              </a:rPr>
+              <a:t>19</a:t>
+            </a:fld>
+          </a:p>
+        </p:txBody>
+      </p:sp>
     </p:spTree>
   </p:cSld>
   <p:clrMapOvr>
@@ -15225,6 +15599,40 @@
               <a:t xml:space="preserve">−3</a:t>
             </a:r>
             <a:endParaRPr lang="en-US" sz="2325" dirty="0"/>
+          </a:p>
+        </p:txBody>
+      </p:sp>
+      <p:sp>
+        <p:nvSpPr>
+          <p:cNvPr id="12" name="Slide Number 12"/>
+          <p:cNvSpPr txBox="1"/>
+          <p:nvPr/>
+        </p:nvSpPr>
+        <p:spPr>
+          <a:xfrm>
+            <a:off x="11277295" y="6611112"/>
+            <a:ext cx="685800" cy="201168"/>
+          </a:xfrm>
+          <a:prstGeom prst="rect">
+            <a:avLst/>
+          </a:prstGeom>
+          <a:noFill/>
+        </p:spPr>
+        <p:txBody>
+          <a:bodyPr wrap="none" lIns="0" tIns="0" rIns="0" bIns="0" anchor="b">
+            <a:noAutofit/>
+          </a:bodyPr>
+          <a:lstStyle/>
+          <a:p>
+            <a:pPr algn="r"/>
+            <a:fld id="{5C1A6E0B-3B1F-4D5E-9C7A-2F4B8D6E1A90}" type="slidenum">
+              <a:rPr lang="en-US" sz="1200" dirty="0">
+                <a:solidFill>
+                  <a:srgbClr val="5F6272"/>
+                </a:solidFill>
+              </a:rPr>
+              <a:t>2</a:t>
+            </a:fld>
           </a:p>
         </p:txBody>
       </p:sp>
@@ -16454,6 +16862,40 @@
           </a:p>
         </p:txBody>
       </p:sp>
+      <p:sp>
+        <p:nvSpPr>
+          <p:cNvPr id="14" name="Slide Number 14"/>
+          <p:cNvSpPr txBox="1"/>
+          <p:nvPr/>
+        </p:nvSpPr>
+        <p:spPr>
+          <a:xfrm>
+            <a:off x="11277295" y="6611112"/>
+            <a:ext cx="685800" cy="201168"/>
+          </a:xfrm>
+          <a:prstGeom prst="rect">
+            <a:avLst/>
+          </a:prstGeom>
+          <a:noFill/>
+        </p:spPr>
+        <p:txBody>
+          <a:bodyPr wrap="none" lIns="0" tIns="0" rIns="0" bIns="0" anchor="b">
+            <a:noAutofit/>
+          </a:bodyPr>
+          <a:lstStyle/>
+          <a:p>
+            <a:pPr algn="r"/>
+            <a:fld id="{5C1A6E0B-3B1F-4D5E-9C7A-2F4B8D6E1A90}" type="slidenum">
+              <a:rPr lang="en-US" sz="1200" dirty="0">
+                <a:solidFill>
+                  <a:srgbClr val="5F6272"/>
+                </a:solidFill>
+              </a:rPr>
+              <a:t>20</a:t>
+            </a:fld>
+          </a:p>
+        </p:txBody>
+      </p:sp>
     </p:spTree>
   </p:cSld>
   <p:clrMapOvr>
@@ -16929,6 +17371,40 @@
               <a:t xml:space="preserve">Any vertical line is perpendicular to any horizontal line.</a:t>
             </a:r>
             <a:endParaRPr lang="en-US" sz="1950" dirty="0"/>
+          </a:p>
+        </p:txBody>
+      </p:sp>
+      <p:sp>
+        <p:nvSpPr>
+          <p:cNvPr id="7" name="Slide Number 7"/>
+          <p:cNvSpPr txBox="1"/>
+          <p:nvPr/>
+        </p:nvSpPr>
+        <p:spPr>
+          <a:xfrm>
+            <a:off x="11277295" y="6611112"/>
+            <a:ext cx="685800" cy="201168"/>
+          </a:xfrm>
+          <a:prstGeom prst="rect">
+            <a:avLst/>
+          </a:prstGeom>
+          <a:noFill/>
+        </p:spPr>
+        <p:txBody>
+          <a:bodyPr wrap="none" lIns="0" tIns="0" rIns="0" bIns="0" anchor="b">
+            <a:noAutofit/>
+          </a:bodyPr>
+          <a:lstStyle/>
+          <a:p>
+            <a:pPr algn="r"/>
+            <a:fld id="{5C1A6E0B-3B1F-4D5E-9C7A-2F4B8D6E1A90}" type="slidenum">
+              <a:rPr lang="en-US" sz="1200" dirty="0">
+                <a:solidFill>
+                  <a:srgbClr val="5F6272"/>
+                </a:solidFill>
+              </a:rPr>
+              <a:t>21</a:t>
+            </a:fld>
           </a:p>
         </p:txBody>
       </p:sp>
@@ -17831,6 +18307,40 @@
           </a:p>
         </p:txBody>
       </p:sp>
+      <p:sp>
+        <p:nvSpPr>
+          <p:cNvPr id="10" name="Slide Number 10"/>
+          <p:cNvSpPr txBox="1"/>
+          <p:nvPr/>
+        </p:nvSpPr>
+        <p:spPr>
+          <a:xfrm>
+            <a:off x="11277295" y="6611112"/>
+            <a:ext cx="685800" cy="201168"/>
+          </a:xfrm>
+          <a:prstGeom prst="rect">
+            <a:avLst/>
+          </a:prstGeom>
+          <a:noFill/>
+        </p:spPr>
+        <p:txBody>
+          <a:bodyPr wrap="none" lIns="0" tIns="0" rIns="0" bIns="0" anchor="b">
+            <a:noAutofit/>
+          </a:bodyPr>
+          <a:lstStyle/>
+          <a:p>
+            <a:pPr algn="r"/>
+            <a:fld id="{5C1A6E0B-3B1F-4D5E-9C7A-2F4B8D6E1A90}" type="slidenum">
+              <a:rPr lang="en-US" sz="1200" dirty="0">
+                <a:solidFill>
+                  <a:srgbClr val="5F6272"/>
+                </a:solidFill>
+              </a:rPr>
+              <a:t>22</a:t>
+            </a:fld>
+          </a:p>
+        </p:txBody>
+      </p:sp>
     </p:spTree>
   </p:cSld>
   <p:clrMapOvr>
@@ -18679,6 +19189,40 @@
               <a:t xml:space="preserve">Not a function</a:t>
             </a:r>
             <a:endParaRPr lang="en-US" sz="2325" dirty="0"/>
+          </a:p>
+        </p:txBody>
+      </p:sp>
+      <p:sp>
+        <p:nvSpPr>
+          <p:cNvPr id="12" name="Slide Number 12"/>
+          <p:cNvSpPr txBox="1"/>
+          <p:nvPr/>
+        </p:nvSpPr>
+        <p:spPr>
+          <a:xfrm>
+            <a:off x="11277295" y="6611112"/>
+            <a:ext cx="685800" cy="201168"/>
+          </a:xfrm>
+          <a:prstGeom prst="rect">
+            <a:avLst/>
+          </a:prstGeom>
+          <a:noFill/>
+        </p:spPr>
+        <p:txBody>
+          <a:bodyPr wrap="none" lIns="0" tIns="0" rIns="0" bIns="0" anchor="b">
+            <a:noAutofit/>
+          </a:bodyPr>
+          <a:lstStyle/>
+          <a:p>
+            <a:pPr algn="r"/>
+            <a:fld id="{5C1A6E0B-3B1F-4D5E-9C7A-2F4B8D6E1A90}" type="slidenum">
+              <a:rPr lang="en-US" sz="1200" dirty="0">
+                <a:solidFill>
+                  <a:srgbClr val="5F6272"/>
+                </a:solidFill>
+              </a:rPr>
+              <a:t>23</a:t>
+            </a:fld>
           </a:p>
         </p:txBody>
       </p:sp>
@@ -19720,6 +20264,40 @@
           </a:p>
         </p:txBody>
       </p:sp>
+      <p:sp>
+        <p:nvSpPr>
+          <p:cNvPr id="15" name="Slide Number 15"/>
+          <p:cNvSpPr txBox="1"/>
+          <p:nvPr/>
+        </p:nvSpPr>
+        <p:spPr>
+          <a:xfrm>
+            <a:off x="11277295" y="6611112"/>
+            <a:ext cx="685800" cy="201168"/>
+          </a:xfrm>
+          <a:prstGeom prst="rect">
+            <a:avLst/>
+          </a:prstGeom>
+          <a:noFill/>
+        </p:spPr>
+        <p:txBody>
+          <a:bodyPr wrap="none" lIns="0" tIns="0" rIns="0" bIns="0" anchor="b">
+            <a:noAutofit/>
+          </a:bodyPr>
+          <a:lstStyle/>
+          <a:p>
+            <a:pPr algn="r"/>
+            <a:fld id="{5C1A6E0B-3B1F-4D5E-9C7A-2F4B8D6E1A90}" type="slidenum">
+              <a:rPr lang="en-US" sz="1200" dirty="0">
+                <a:solidFill>
+                  <a:srgbClr val="5F6272"/>
+                </a:solidFill>
+              </a:rPr>
+              <a:t>24</a:t>
+            </a:fld>
+          </a:p>
+        </p:txBody>
+      </p:sp>
     </p:spTree>
   </p:cSld>
   <p:clrMapOvr>
@@ -20016,6 +20594,40 @@
           </a:p>
         </p:txBody>
       </p:sp>
+      <p:sp>
+        <p:nvSpPr>
+          <p:cNvPr id="8" name="Slide Number 8"/>
+          <p:cNvSpPr txBox="1"/>
+          <p:nvPr/>
+        </p:nvSpPr>
+        <p:spPr>
+          <a:xfrm>
+            <a:off x="11277295" y="6611112"/>
+            <a:ext cx="685800" cy="201168"/>
+          </a:xfrm>
+          <a:prstGeom prst="rect">
+            <a:avLst/>
+          </a:prstGeom>
+          <a:noFill/>
+        </p:spPr>
+        <p:txBody>
+          <a:bodyPr wrap="none" lIns="0" tIns="0" rIns="0" bIns="0" anchor="b">
+            <a:noAutofit/>
+          </a:bodyPr>
+          <a:lstStyle/>
+          <a:p>
+            <a:pPr algn="r"/>
+            <a:fld id="{5C1A6E0B-3B1F-4D5E-9C7A-2F4B8D6E1A90}" type="slidenum">
+              <a:rPr lang="en-US" sz="1200" dirty="0">
+                <a:solidFill>
+                  <a:srgbClr val="5F6272"/>
+                </a:solidFill>
+              </a:rPr>
+              <a:t>3</a:t>
+            </a:fld>
+          </a:p>
+        </p:txBody>
+      </p:sp>
     </p:spTree>
   </p:cSld>
   <p:clrMapOvr>
@@ -20217,6 +20829,40 @@
               <a:t xml:space="preserve">2. Identify and write the equations of horizontal and vertical lines.</a:t>
             </a:r>
             <a:endParaRPr lang="en-US" sz="1950" dirty="0"/>
+          </a:p>
+        </p:txBody>
+      </p:sp>
+      <p:sp>
+        <p:nvSpPr>
+          <p:cNvPr id="6" name="Slide Number 6"/>
+          <p:cNvSpPr txBox="1"/>
+          <p:nvPr/>
+        </p:nvSpPr>
+        <p:spPr>
+          <a:xfrm>
+            <a:off x="11277295" y="6611112"/>
+            <a:ext cx="685800" cy="201168"/>
+          </a:xfrm>
+          <a:prstGeom prst="rect">
+            <a:avLst/>
+          </a:prstGeom>
+          <a:noFill/>
+        </p:spPr>
+        <p:txBody>
+          <a:bodyPr wrap="none" lIns="0" tIns="0" rIns="0" bIns="0" anchor="b">
+            <a:noAutofit/>
+          </a:bodyPr>
+          <a:lstStyle/>
+          <a:p>
+            <a:pPr algn="r"/>
+            <a:fld id="{5C1A6E0B-3B1F-4D5E-9C7A-2F4B8D6E1A90}" type="slidenum">
+              <a:rPr lang="en-US" sz="1200" dirty="0">
+                <a:solidFill>
+                  <a:srgbClr val="5F6272"/>
+                </a:solidFill>
+              </a:rPr>
+              <a:t>4</a:t>
+            </a:fld>
           </a:p>
         </p:txBody>
       </p:sp>
@@ -21836,6 +22482,40 @@
           </a:p>
         </p:txBody>
       </p:sp>
+      <p:sp>
+        <p:nvSpPr>
+          <p:cNvPr id="28" name="Slide Number 28"/>
+          <p:cNvSpPr txBox="1"/>
+          <p:nvPr/>
+        </p:nvSpPr>
+        <p:spPr>
+          <a:xfrm>
+            <a:off x="11277295" y="6611112"/>
+            <a:ext cx="685800" cy="201168"/>
+          </a:xfrm>
+          <a:prstGeom prst="rect">
+            <a:avLst/>
+          </a:prstGeom>
+          <a:noFill/>
+        </p:spPr>
+        <p:txBody>
+          <a:bodyPr wrap="none" lIns="0" tIns="0" rIns="0" bIns="0" anchor="b">
+            <a:noAutofit/>
+          </a:bodyPr>
+          <a:lstStyle/>
+          <a:p>
+            <a:pPr algn="r"/>
+            <a:fld id="{5C1A6E0B-3B1F-4D5E-9C7A-2F4B8D6E1A90}" type="slidenum">
+              <a:rPr lang="en-US" sz="1200" dirty="0">
+                <a:solidFill>
+                  <a:srgbClr val="5F6272"/>
+                </a:solidFill>
+              </a:rPr>
+              <a:t>5</a:t>
+            </a:fld>
+          </a:p>
+        </p:txBody>
+      </p:sp>
     </p:spTree>
   </p:cSld>
   <p:clrMapOvr>
@@ -21993,6 +22673,40 @@
               <a:t xml:space="preserve">How can you rotate the graphs of linear equations to determine the slopes of perpendicular lines?</a:t>
             </a:r>
             <a:endParaRPr lang="en-US" sz="2700" dirty="0"/>
+          </a:p>
+        </p:txBody>
+      </p:sp>
+      <p:sp>
+        <p:nvSpPr>
+          <p:cNvPr id="5" name="Slide Number 5"/>
+          <p:cNvSpPr txBox="1"/>
+          <p:nvPr/>
+        </p:nvSpPr>
+        <p:spPr>
+          <a:xfrm>
+            <a:off x="11277295" y="6611112"/>
+            <a:ext cx="685800" cy="201168"/>
+          </a:xfrm>
+          <a:prstGeom prst="rect">
+            <a:avLst/>
+          </a:prstGeom>
+          <a:noFill/>
+        </p:spPr>
+        <p:txBody>
+          <a:bodyPr wrap="none" lIns="0" tIns="0" rIns="0" bIns="0" anchor="b">
+            <a:noAutofit/>
+          </a:bodyPr>
+          <a:lstStyle/>
+          <a:p>
+            <a:pPr algn="r"/>
+            <a:fld id="{5C1A6E0B-3B1F-4D5E-9C7A-2F4B8D6E1A90}" type="slidenum">
+              <a:rPr lang="en-US" sz="1200" dirty="0">
+                <a:solidFill>
+                  <a:srgbClr val="5F6272"/>
+                </a:solidFill>
+              </a:rPr>
+              <a:t>6</a:t>
+            </a:fld>
           </a:p>
         </p:txBody>
       </p:sp>
@@ -25634,6 +26348,40 @@
               <a:t xml:space="preserve">B‴</a:t>
             </a:r>
             <a:endParaRPr lang="en-US" sz="1125" dirty="0"/>
+          </a:p>
+        </p:txBody>
+      </p:sp>
+      <p:sp>
+        <p:nvSpPr>
+          <p:cNvPr id="95" name="Slide Number 95"/>
+          <p:cNvSpPr txBox="1"/>
+          <p:nvPr/>
+        </p:nvSpPr>
+        <p:spPr>
+          <a:xfrm>
+            <a:off x="11277295" y="6611112"/>
+            <a:ext cx="685800" cy="201168"/>
+          </a:xfrm>
+          <a:prstGeom prst="rect">
+            <a:avLst/>
+          </a:prstGeom>
+          <a:noFill/>
+        </p:spPr>
+        <p:txBody>
+          <a:bodyPr wrap="none" lIns="0" tIns="0" rIns="0" bIns="0" anchor="b">
+            <a:noAutofit/>
+          </a:bodyPr>
+          <a:lstStyle/>
+          <a:p>
+            <a:pPr algn="r"/>
+            <a:fld id="{5C1A6E0B-3B1F-4D5E-9C7A-2F4B8D6E1A90}" type="slidenum">
+              <a:rPr lang="en-US" sz="1200" dirty="0">
+                <a:solidFill>
+                  <a:srgbClr val="5F6272"/>
+                </a:solidFill>
+              </a:rPr>
+              <a:t>7</a:t>
+            </a:fld>
           </a:p>
         </p:txBody>
       </p:sp>
@@ -27701,6 +28449,40 @@
           </a:p>
         </p:txBody>
       </p:sp>
+      <p:sp>
+        <p:nvSpPr>
+          <p:cNvPr id="18" name="Slide Number 18"/>
+          <p:cNvSpPr txBox="1"/>
+          <p:nvPr/>
+        </p:nvSpPr>
+        <p:spPr>
+          <a:xfrm>
+            <a:off x="11277295" y="6611112"/>
+            <a:ext cx="685800" cy="201168"/>
+          </a:xfrm>
+          <a:prstGeom prst="rect">
+            <a:avLst/>
+          </a:prstGeom>
+          <a:noFill/>
+        </p:spPr>
+        <p:txBody>
+          <a:bodyPr wrap="none" lIns="0" tIns="0" rIns="0" bIns="0" anchor="b">
+            <a:noAutofit/>
+          </a:bodyPr>
+          <a:lstStyle/>
+          <a:p>
+            <a:pPr algn="r"/>
+            <a:fld id="{5C1A6E0B-3B1F-4D5E-9C7A-2F4B8D6E1A90}" type="slidenum">
+              <a:rPr lang="en-US" sz="1200" dirty="0">
+                <a:solidFill>
+                  <a:srgbClr val="5F6272"/>
+                </a:solidFill>
+              </a:rPr>
+              <a:t>8</a:t>
+            </a:fld>
+          </a:p>
+        </p:txBody>
+      </p:sp>
     </p:spTree>
   </p:cSld>
   <p:clrMapOvr>
@@ -31181,6 +31963,40 @@
           </a:p>
         </p:txBody>
       </p:sp>
+      <p:sp>
+        <p:nvSpPr>
+          <p:cNvPr id="60" name="Slide Number 60"/>
+          <p:cNvSpPr txBox="1"/>
+          <p:nvPr/>
+        </p:nvSpPr>
+        <p:spPr>
+          <a:xfrm>
+            <a:off x="11277295" y="6611112"/>
+            <a:ext cx="685800" cy="201168"/>
+          </a:xfrm>
+          <a:prstGeom prst="rect">
+            <a:avLst/>
+          </a:prstGeom>
+          <a:noFill/>
+        </p:spPr>
+        <p:txBody>
+          <a:bodyPr wrap="none" lIns="0" tIns="0" rIns="0" bIns="0" anchor="b">
+            <a:noAutofit/>
+          </a:bodyPr>
+          <a:lstStyle/>
+          <a:p>
+            <a:pPr algn="r"/>
+            <a:fld id="{5C1A6E0B-3B1F-4D5E-9C7A-2F4B8D6E1A90}" type="slidenum">
+              <a:rPr lang="en-US" sz="1200" dirty="0">
+                <a:solidFill>
+                  <a:srgbClr val="5F6272"/>
+                </a:solidFill>
+              </a:rPr>
+              <a:t>9</a:t>
+            </a:fld>
+          </a:p>
+        </p:txBody>
+      </p:sp>
     </p:spTree>
   </p:cSld>
   <p:clrMapOvr>

--- a/Section 504/t2-lesson3-perpendicular-slopes-504.pptx
+++ b/Section 504/t2-lesson3-perpendicular-slopes-504.pptx
@@ -417,7 +417,7 @@
           <a:p>
             <a:r>
               <a:rPr lang="en-US" dirty="0"/>
-              <a:t>Added for this deck; not from the textbook. Have this up as students walk in; they work silently while you take attendance (about 5 minutes). The same 4 questions are on the online Day 2 bell work. Reveal the answers one at a time. Answer key: 1. Perpendicular slopes are negative reciprocals: ⅔ · (−3/2) = −1. 2. On a horizontal line y never changes, so the rise is 0. 3. Every point on a vertical line has the same x-value, here 2. 4. Negative reciprocals multiply to −1.</a:t>
+              <a:t>Added for this deck; not from the textbook. Have this up as students walk in; they work silently while you take attendance (about 5 minutes). The same 4 questions are on the online Day 2 bell work. Reveal the answers one at a time. Answer key: 1. Perpendicular slopes are negative reciprocals: ⅔ · (−3/2) = −1. 2. On a horizontal line y never changes, so the rise is 0. 3. Every point on a vertical line has the same x-value, here 2. 4. Perpendicular slope: −½. Put in the point: 1 = −½(4) + b = −2 + b, so b = 3.</a:t>
             </a:r>
           </a:p>
         </p:txBody>
@@ -830,7 +830,7 @@
           <a:p>
             <a:r>
               <a:rPr lang="en-US" dirty="0"/>
-              <a:t>Added for this deck; not from the textbook. Have this up as students walk in; they work silently while you take attendance (about 5 minutes). The same 4 questions are on the online Day 1 bell work. Reveal the answers one at a time. Answer key: 1. Flip the fraction: ⅔ · 3/2 = 1. 2. A 90° counterclockwise rotation maps (x, y) to (−y, x). 3. Slope = (5 − 0) ÷ (8 − 0) = 5/8. 4. In y = mx + b, m = −3.</a:t>
+              <a:t>Added for this deck; not from the textbook. Have this up as students walk in; they work silently while you take attendance (about 5 minutes). The same 4 questions are on the online Day 1 bell work. Reveal the answers one at a time. Answer key: 1. Flip the fraction: ⅔ · 3/2 = 1. 2. A 90° counterclockwise rotation maps (x, y) to (−y, x). 3. Slope = (5 − 0) ÷ (8 − 0) = 5/8. 4. Slope = (−2 − 4) ÷ (2 − (−1)) = −6 ÷ 3 = −2.</a:t>
             </a:r>
           </a:p>
         </p:txBody>
@@ -5218,7 +5218,77 @@
                 <a:latin typeface="Segoe UI"/>
                 <a:cs typeface="Segoe UI"/>
               </a:rPr>
-              <a:t xml:space="preserve">4. What is the product of the slopes of two perpendicular lines (neither vertical)? </a:t>
+              <a:t xml:space="preserve">4. Which equation represents a line perpendicular to </a:t>
+            </a:r>
+            <a:r>
+              <a:rPr lang="en-US" sz="1950" dirty="0" i="1">
+                <a:solidFill>
+                  <a:srgbClr val="16171D"/>
+                </a:solidFill>
+                <a:latin typeface="Cambria"/>
+                <a:cs typeface="Cambria"/>
+              </a:rPr>
+              <a:t xml:space="preserve">y</a:t>
+            </a:r>
+            <a:r>
+              <a:rPr lang="en-US" sz="1950" dirty="0">
+                <a:solidFill>
+                  <a:srgbClr val="16171D"/>
+                </a:solidFill>
+                <a:latin typeface="Cambria"/>
+                <a:cs typeface="Cambria"/>
+              </a:rPr>
+              <a:t xml:space="preserve"> = 2</a:t>
+            </a:r>
+            <a:r>
+              <a:rPr lang="en-US" sz="1950" dirty="0" i="1">
+                <a:solidFill>
+                  <a:srgbClr val="16171D"/>
+                </a:solidFill>
+                <a:latin typeface="Cambria"/>
+                <a:cs typeface="Cambria"/>
+              </a:rPr>
+              <a:t xml:space="preserve">x</a:t>
+            </a:r>
+            <a:r>
+              <a:rPr lang="en-US" sz="1950" dirty="0">
+                <a:solidFill>
+                  <a:srgbClr val="16171D"/>
+                </a:solidFill>
+                <a:latin typeface="Cambria"/>
+                <a:cs typeface="Cambria"/>
+              </a:rPr>
+              <a:t xml:space="preserve"> + 3</a:t>
+            </a:r>
+            <a:r>
+              <a:rPr lang="en-US" sz="1950" dirty="0">
+                <a:solidFill>
+                  <a:srgbClr val="16171D"/>
+                </a:solidFill>
+                <a:latin typeface="Segoe UI"/>
+                <a:cs typeface="Segoe UI"/>
+              </a:rPr>
+              <a:t xml:space="preserve"> that passes through the point </a:t>
+            </a:r>
+            <a:r>
+              <a:rPr lang="en-US" sz="1950" dirty="0">
+                <a:solidFill>
+                  <a:srgbClr val="16171D"/>
+                </a:solidFill>
+                <a:latin typeface="Cambria"/>
+                <a:cs typeface="Cambria"/>
+              </a:rPr>
+              <a:t xml:space="preserve">(4, 1)</a:t>
+            </a:r>
+            <a:r>
+              <a:rPr lang="en-US" sz="1950" dirty="0">
+                <a:solidFill>
+                  <a:srgbClr val="16171D"/>
+                </a:solidFill>
+                <a:latin typeface="Segoe UI"/>
+                <a:cs typeface="Segoe UI"/>
+              </a:rPr>
+              <a:t xml:space="preserve">? </a:t>
             </a:r>
             <a:r>
               <a:rPr lang="en-US" sz="1575" dirty="0">
@@ -5228,7 +5298,7 @@
                 <a:latin typeface="Segoe UI"/>
                 <a:cs typeface="Segoe UI"/>
               </a:rPr>
-              <a:t xml:space="preserve">(SE p. 308)</a:t>
+              <a:t xml:space="preserve">(SE p. 312)</a:t>
             </a:r>
             <a:endParaRPr lang="en-US" sz="1950" dirty="0"/>
           </a:p>
@@ -5243,7 +5313,7 @@
         <p:spPr>
           <a:xfrm>
             <a:off x="6362548" y="4323588"/>
-            <a:ext cx="2244715" cy="518922"/>
+            <a:ext cx="3737153" cy="518922"/>
           </a:xfrm>
           <a:prstGeom prst="roundRect">
             <a:avLst>
@@ -5279,6 +5349,16 @@
               <a:t xml:space="preserve">ANSWER   </a:t>
             </a:r>
             <a:r>
+              <a:rPr lang="en-US" sz="2325" dirty="0" i="1">
+                <a:solidFill>
+                  <a:srgbClr val="16171D"/>
+                </a:solidFill>
+                <a:latin typeface="Cambria"/>
+                <a:cs typeface="Cambria"/>
+              </a:rPr>
+              <a:t xml:space="preserve">y</a:t>
+            </a:r>
+            <a:r>
               <a:rPr lang="en-US" sz="2325" dirty="0">
                 <a:solidFill>
                   <a:srgbClr val="16171D"/>
@@ -5286,7 +5366,27 @@
                 <a:latin typeface="Cambria"/>
                 <a:cs typeface="Cambria"/>
               </a:rPr>
-              <a:t xml:space="preserve">−1</a:t>
+              <a:t xml:space="preserve"> = −½</a:t>
+            </a:r>
+            <a:r>
+              <a:rPr lang="en-US" sz="2325" dirty="0" i="1">
+                <a:solidFill>
+                  <a:srgbClr val="16171D"/>
+                </a:solidFill>
+                <a:latin typeface="Cambria"/>
+                <a:cs typeface="Cambria"/>
+              </a:rPr>
+              <a:t xml:space="preserve">x</a:t>
+            </a:r>
+            <a:r>
+              <a:rPr lang="en-US" sz="2325" dirty="0">
+                <a:solidFill>
+                  <a:srgbClr val="16171D"/>
+                </a:solidFill>
+                <a:latin typeface="Cambria"/>
+                <a:cs typeface="Cambria"/>
+              </a:rPr>
+              <a:t xml:space="preserve"> + 3</a:t>
             </a:r>
             <a:endParaRPr lang="en-US" sz="2325" dirty="0"/>
           </a:p>
@@ -15459,7 +15559,7 @@
         <p:spPr>
           <a:xfrm>
             <a:off x="6362548" y="3243834"/>
-            <a:ext cx="5143348" cy="352044"/>
+            <a:ext cx="5143348" cy="946404"/>
           </a:xfrm>
           <a:prstGeom prst="rect">
             <a:avLst/>
@@ -15488,17 +15588,7 @@
                 <a:latin typeface="Segoe UI"/>
                 <a:cs typeface="Segoe UI"/>
               </a:rPr>
-              <a:t xml:space="preserve">4. What is the slope of </a:t>
-            </a:r>
-            <a:r>
-              <a:rPr lang="en-US" sz="1950" dirty="0" i="1">
-                <a:solidFill>
-                  <a:srgbClr val="16171D"/>
-                </a:solidFill>
-                <a:latin typeface="Cambria"/>
-                <a:cs typeface="Cambria"/>
-              </a:rPr>
-              <a:t xml:space="preserve">y</a:t>
+              <a:t xml:space="preserve">4. A line passes through the points </a:t>
             </a:r>
             <a:r>
               <a:rPr lang="en-US" sz="1950" dirty="0">
@@ -15508,37 +15598,37 @@
                 <a:latin typeface="Cambria"/>
                 <a:cs typeface="Cambria"/>
               </a:rPr>
-              <a:t xml:space="preserve"> = −3</a:t>
-            </a:r>
-            <a:r>
-              <a:rPr lang="en-US" sz="1950" dirty="0" i="1">
-                <a:solidFill>
-                  <a:srgbClr val="16171D"/>
-                </a:solidFill>
-                <a:latin typeface="Cambria"/>
-                <a:cs typeface="Cambria"/>
-              </a:rPr>
-              <a:t xml:space="preserve">x</a:t>
+              <a:t xml:space="preserve">(−1, 4)</a:t>
             </a:r>
             <a:r>
               <a:rPr lang="en-US" sz="1950" dirty="0">
                 <a:solidFill>
                   <a:srgbClr val="16171D"/>
                 </a:solidFill>
-                <a:latin typeface="Cambria"/>
-                <a:cs typeface="Cambria"/>
-              </a:rPr>
-              <a:t xml:space="preserve"> + 5</a:t>
+                <a:latin typeface="Segoe UI"/>
+                <a:cs typeface="Segoe UI"/>
+              </a:rPr>
+              <a:t xml:space="preserve"> and </a:t>
             </a:r>
             <a:r>
               <a:rPr lang="en-US" sz="1950" dirty="0">
                 <a:solidFill>
                   <a:srgbClr val="16171D"/>
                 </a:solidFill>
-                <a:latin typeface="Segoe UI"/>
-                <a:cs typeface="Segoe UI"/>
-              </a:rPr>
-              <a:t xml:space="preserve">?</a:t>
+                <a:latin typeface="Cambria"/>
+                <a:cs typeface="Cambria"/>
+              </a:rPr>
+              <a:t xml:space="preserve">(2, −2)</a:t>
+            </a:r>
+            <a:r>
+              <a:rPr lang="en-US" sz="1950" dirty="0">
+                <a:solidFill>
+                  <a:srgbClr val="16171D"/>
+                </a:solidFill>
+                <a:latin typeface="Segoe UI"/>
+                <a:cs typeface="Segoe UI"/>
+              </a:rPr>
+              <a:t xml:space="preserve">. What is the slope of the line?</a:t>
             </a:r>
             <a:endParaRPr lang="en-US" sz="1950" dirty="0"/>
           </a:p>
@@ -15552,7 +15642,7 @@
         </p:nvSpPr>
         <p:spPr>
           <a:xfrm>
-            <a:off x="6362548" y="3729228"/>
+            <a:off x="6362548" y="4323588"/>
             <a:ext cx="2244715" cy="518922"/>
           </a:xfrm>
           <a:prstGeom prst="roundRect">
@@ -15596,7 +15686,7 @@
                 <a:latin typeface="Cambria"/>
                 <a:cs typeface="Cambria"/>
               </a:rPr>
-              <a:t xml:space="preserve">−3</a:t>
+              <a:t xml:space="preserve">−2</a:t>
             </a:r>
             <a:endParaRPr lang="en-US" sz="2325" dirty="0"/>
           </a:p>

--- a/Section 504/t2-lesson3-perpendicular-slopes-504.pptx
+++ b/Section 504/t2-lesson3-perpendicular-slopes-504.pptx
@@ -2513,7 +2513,7 @@
                 <a:latin typeface="Segoe UI"/>
                 <a:cs typeface="Segoe UI"/>
               </a:rPr>
-              <a:t xml:space="preserve">Day 1 · Activity 3.1 · Question 4 · SE p. 309</a:t>
+              <a:t xml:space="preserve">Day 1 · Activity 3.1 · Question 4 · SE p. 309 · ★ Essential</a:t>
             </a:r>
             <a:endParaRPr lang="en-US" sz="1200" dirty="0"/>
           </a:p>
@@ -6050,7 +6050,7 @@
                 <a:latin typeface="Segoe UI"/>
                 <a:cs typeface="Segoe UI"/>
               </a:rPr>
-              <a:t xml:space="preserve">☐ Activity 3.2: horizontal and vertical lines</a:t>
+              <a:t xml:space="preserve">☐ Activity 3.2: horizontal and vertical lines ★ Essential</a:t>
             </a:r>
             <a:endParaRPr lang="en-US" sz="1950" dirty="0"/>
           </a:p>
@@ -6094,7 +6094,7 @@
                 <a:latin typeface="Segoe UI"/>
                 <a:cs typeface="Segoe UI"/>
               </a:rPr>
-              <a:t xml:space="preserve">☐ Activity 3.3: write perpendicular lines</a:t>
+              <a:t xml:space="preserve">☐ Activity 3.3: write perpendicular lines ★ Essential</a:t>
             </a:r>
             <a:endParaRPr lang="en-US" sz="1950" dirty="0"/>
           </a:p>
@@ -6336,7 +6336,7 @@
                 <a:latin typeface="Segoe UI"/>
                 <a:cs typeface="Segoe UI"/>
               </a:rPr>
-              <a:t xml:space="preserve">Day 2 · Activity 3.2 · Horizontal and Vertical Lines · SE pp. 310–311</a:t>
+              <a:t xml:space="preserve">Day 2 · Activity 3.2 · Horizontal and Vertical Lines · SE pp. 310–311 · ★ Essential</a:t>
             </a:r>
             <a:endParaRPr lang="en-US" sz="1200" dirty="0"/>
           </a:p>
@@ -9857,7 +9857,7 @@
                 <a:latin typeface="Segoe UI"/>
                 <a:cs typeface="Segoe UI"/>
               </a:rPr>
-              <a:t xml:space="preserve">Day 2 · Activity 3.2 · Questions 6–10 · SE p. 311</a:t>
+              <a:t xml:space="preserve">Day 2 · Activity 3.2 · Questions 6–10 · SE p. 311 · ★ Essential</a:t>
             </a:r>
             <a:endParaRPr lang="en-US" sz="1200" dirty="0"/>
           </a:p>
@@ -11431,7 +11431,7 @@
                 <a:latin typeface="Segoe UI"/>
                 <a:cs typeface="Segoe UI"/>
               </a:rPr>
-              <a:t xml:space="preserve">Day 2 · Activity 3.3 · Writing Equations of Perpendicular Lines · SE p. 312</a:t>
+              <a:t xml:space="preserve">Day 2 · Activity 3.3 · Writing Equations of Perpendicular Lines · SE p. 312 · ★ Essential</a:t>
             </a:r>
             <a:endParaRPr lang="en-US" sz="1200" dirty="0"/>
           </a:p>
@@ -12589,7 +12589,7 @@
                 <a:latin typeface="Segoe UI"/>
                 <a:cs typeface="Segoe UI"/>
               </a:rPr>
-              <a:t xml:space="preserve">Day 2 · Activity 3.3 · Questions 3–5 · SE pp. 312–313</a:t>
+              <a:t xml:space="preserve">Day 2 · Activity 3.3 · Questions 3–5 · SE pp. 312–313 · ★ Essential</a:t>
             </a:r>
             <a:endParaRPr lang="en-US" sz="1200" dirty="0"/>
           </a:p>
@@ -20630,7 +20630,7 @@
                 <a:latin typeface="Segoe UI"/>
                 <a:cs typeface="Segoe UI"/>
               </a:rPr>
-              <a:t xml:space="preserve">☐ Activity 3.1: slopes of perpendicular lines</a:t>
+              <a:t xml:space="preserve">☐ Activity 3.1: slopes of perpendicular lines ★ Essential</a:t>
             </a:r>
             <a:endParaRPr lang="en-US" sz="1950" dirty="0"/>
           </a:p>
@@ -27621,7 +27621,7 @@
                 <a:latin typeface="Segoe UI"/>
                 <a:cs typeface="Segoe UI"/>
               </a:rPr>
-              <a:t xml:space="preserve">Day 1 · Activity 3.1 · Slopes of Perpendicular Lines · SE p. 307</a:t>
+              <a:t xml:space="preserve">Day 1 · Activity 3.1 · Slopes of Perpendicular Lines · SE p. 307 · ★ Essential</a:t>
             </a:r>
             <a:endParaRPr lang="en-US" sz="1200" dirty="0"/>
           </a:p>
@@ -29461,7 +29461,7 @@
                 <a:latin typeface="Segoe UI"/>
                 <a:cs typeface="Segoe UI"/>
               </a:rPr>
-              <a:t xml:space="preserve">Day 1 · Activity 3.1 · Worked Example · SE p. 308</a:t>
+              <a:t xml:space="preserve">Day 1 · Activity 3.1 · Worked Example · SE p. 308 · ★ Essential</a:t>
             </a:r>
             <a:endParaRPr lang="en-US" sz="1200" dirty="0"/>
           </a:p>
